--- a/praesentationen/tag-4-networking.pptx
+++ b/praesentationen/tag-4-networking.pptx
@@ -113,20 +113,20 @@
   <p:extLst>
     <p:ext uri="{521415D9-36F7-43E2-AB2F-B90AF26B5E84}">
       <p14:sectionLst xmlns:p14="http://schemas.microsoft.com/office/powerpoint/2010/main">
-        <p14:section name="Start" id="{ebb26e3f-4b7f-c9f7-efef-e3ff814b2d56}">
+        <p14:section name="Start" id="{8c0d50e4-d4e3-033b-968d-465ff97226c6}">
           <p14:sldIdLst>
             <p14:sldId id="256"/>
             <p14:sldId id="257"/>
           </p14:sldIdLst>
         </p14:section>
-        <p14:section name="Heute" id="{4750a802-daa9-b382-0015-cc8dd7667c14}">
+        <p14:section name="Heute" id="{5f2403cf-200b-1eed-18ef-9e09b2c43a11}">
           <p14:sldIdLst>
             <p14:sldId id="258"/>
             <p14:sldId id="259"/>
             <p14:sldId id="260"/>
           </p14:sldIdLst>
         </p14:section>
-        <p14:section name="Abschluss" id="{5f60bc8a-a5c2-54e3-a72c-1169f910f1d0}">
+        <p14:section name="Abschluss" id="{b71c92f7-3e2e-e6ed-7180-db202951517c}">
           <p14:sldIdLst>
             <p14:sldId id="261"/>
             <p14:sldId id="262"/>

--- a/praesentationen/tag-4-networking.pptx
+++ b/praesentationen/tag-4-networking.pptx
@@ -113,20 +113,20 @@
   <p:extLst>
     <p:ext uri="{521415D9-36F7-43E2-AB2F-B90AF26B5E84}">
       <p14:sectionLst xmlns:p14="http://schemas.microsoft.com/office/powerpoint/2010/main">
-        <p14:section name="Start" id="{8c0d50e4-d4e3-033b-968d-465ff97226c6}">
+        <p14:section name="Start" id="{5cd97fdf-5995-d677-8625-a0701a4b686e}">
           <p14:sldIdLst>
             <p14:sldId id="256"/>
             <p14:sldId id="257"/>
           </p14:sldIdLst>
         </p14:section>
-        <p14:section name="Heute" id="{5f2403cf-200b-1eed-18ef-9e09b2c43a11}">
+        <p14:section name="Heute" id="{59cb6abe-3944-138e-0e55-a90d5edcf967}">
           <p14:sldIdLst>
             <p14:sldId id="258"/>
             <p14:sldId id="259"/>
             <p14:sldId id="260"/>
           </p14:sldIdLst>
         </p14:section>
-        <p14:section name="Abschluss" id="{b71c92f7-3e2e-e6ed-7180-db202951517c}">
+        <p14:section name="Abschluss" id="{169ad23e-6370-5239-b03f-6ec020a28c15}">
           <p14:sldIdLst>
             <p14:sldId id="261"/>
             <p14:sldId id="262"/>
@@ -4507,7 +4507,7 @@
                             <a:srgbClr val="27303A"/>
                           </a:solidFill>
                         </a:rPr>
-                        <a:t>Network Security Groups · Auftrag 4.3: Zwei VMs im VNet</a:t>
+                        <a:t>Netzwerksicherheitsgruppen (NSG) · Auftrag 4.3: Zwei VMs im VNet</a:t>
                       </a:r>
                       <a:endParaRPr lang="en-US" sz="1700" dirty="0"/>
                     </a:p>

--- a/praesentationen/tag-4-networking.pptx
+++ b/praesentationen/tag-4-networking.pptx
@@ -113,20 +113,20 @@
   <p:extLst>
     <p:ext uri="{521415D9-36F7-43E2-AB2F-B90AF26B5E84}">
       <p14:sectionLst xmlns:p14="http://schemas.microsoft.com/office/powerpoint/2010/main">
-        <p14:section name="Start" id="{5cd97fdf-5995-d677-8625-a0701a4b686e}">
+        <p14:section name="Start" id="{e464e768-a45c-eef6-db41-77520d46016e}">
           <p14:sldIdLst>
             <p14:sldId id="256"/>
             <p14:sldId id="257"/>
           </p14:sldIdLst>
         </p14:section>
-        <p14:section name="Heute" id="{59cb6abe-3944-138e-0e55-a90d5edcf967}">
+        <p14:section name="Heute" id="{dfbfd0e7-0acb-c87e-393b-5e238add0d2e}">
           <p14:sldIdLst>
             <p14:sldId id="258"/>
             <p14:sldId id="259"/>
             <p14:sldId id="260"/>
           </p14:sldIdLst>
         </p14:section>
-        <p14:section name="Abschluss" id="{169ad23e-6370-5239-b03f-6ec020a28c15}">
+        <p14:section name="Abschluss" id="{4590c3c8-049e-5b45-00f7-fe79c64c65b5}">
           <p14:sldIdLst>
             <p14:sldId id="261"/>
             <p14:sldId id="262"/>
@@ -1142,7 +1142,7 @@
     <p:bg>
       <p:bgPr>
         <a:solidFill>
-          <a:srgbClr val="27303A"/>
+          <a:srgbClr val="FFFFFF"/>
         </a:solidFill>
       </p:bgPr>
     </p:bg>
@@ -1162,7 +1162,7 @@
       </p:grpSpPr>
       <p:pic>
         <p:nvPicPr>
-          <p:cNvPr id="2" name="Image 0" descr="C:\Users\Thanam\AppData\Local\Temp\claude\c--Projekt-Trainings-azure-basics-training\a9e0bf4e-0d08-4082-a38a-5b8886538508\scratchpad\pptx\assets\logo-hell.png">    </p:cNvPr>
+          <p:cNvPr id="2" name="Image 0" descr="C:\Users\Thanam\AppData\Local\Temp\claude\c--Projekt-Trainings-azure-basics-training\a7a6b8eb-22f3-4b42-aecc-5af05d1502b1\scratchpad\folien\assets\logo-dunkel.png">    </p:cNvPr>
           <p:cNvPicPr>
             <a:picLocks noChangeAspect="1"/>
           </p:cNvPicPr>
@@ -1186,7 +1186,7 @@
       </p:pic>
       <p:pic>
         <p:nvPicPr>
-          <p:cNvPr id="3" name="Image 1" descr="C:\Users\Thanam\AppData\Local\Temp\claude\c--Projekt-Trainings-azure-basics-training\a9e0bf4e-0d08-4082-a38a-5b8886538508\scratchpad\pptx\assets\wolke.png">    </p:cNvPr>
+          <p:cNvPr id="3" name="Image 1" descr="C:\Users\Thanam\AppData\Local\Temp\claude\c--Projekt-Trainings-azure-basics-training\a7a6b8eb-22f3-4b42-aecc-5af05d1502b1\scratchpad\folien\assets\wolke.png">    </p:cNvPr>
           <p:cNvPicPr>
             <a:picLocks noChangeAspect="1"/>
           </p:cNvPicPr>
@@ -1234,7 +1234,7 @@
               <a:buNone/>
               <a:defRPr lang="en-US" sz="4400" b="1" dirty="0">
                 <a:solidFill>
-                  <a:srgbClr val="FFFFFF"/>
+                  <a:srgbClr val="27303A"/>
                 </a:solidFill>
               </a:defRPr>
             </a:lvl1pPr>
@@ -1273,7 +1273,7 @@
               <a:buNone/>
               <a:defRPr lang="en-US" sz="2000" dirty="0">
                 <a:solidFill>
-                  <a:srgbClr val="DEE2FB"/>
+                  <a:srgbClr val="006FAD"/>
                 </a:solidFill>
               </a:defRPr>
             </a:lvl1pPr>
@@ -1313,7 +1313,7 @@
             <a:r>
               <a:rPr lang="en-US" sz="1200" dirty="0">
                 <a:solidFill>
-                  <a:srgbClr val="DEE2FB"/>
+                  <a:srgbClr val="6F6F6F"/>
                 </a:solidFill>
               </a:rPr>
               <a:t>Kanton Zürich · ICT-Grundbildung · PAT Cloud Solutions</a:t>
@@ -1336,7 +1336,7 @@
     <p:bg>
       <p:bgPr>
         <a:solidFill>
-          <a:srgbClr val="006FAD"/>
+          <a:srgbClr val="F7F7F7"/>
         </a:solidFill>
       </p:bgPr>
     </p:bg>
@@ -1356,7 +1356,7 @@
       </p:grpSpPr>
       <p:pic>
         <p:nvPicPr>
-          <p:cNvPr id="2" name="Image 0" descr="C:\Users\Thanam\AppData\Local\Temp\claude\c--Projekt-Trainings-azure-basics-training\a9e0bf4e-0d08-4082-a38a-5b8886538508\scratchpad\pptx\assets\wolke.png">    </p:cNvPr>
+          <p:cNvPr id="2" name="Image 0" descr="C:\Users\Thanam\AppData\Local\Temp\claude\c--Projekt-Trainings-azure-basics-training\a7a6b8eb-22f3-4b42-aecc-5af05d1502b1\scratchpad\folien\assets\wolke.png">    </p:cNvPr>
           <p:cNvPicPr>
             <a:picLocks noChangeAspect="1"/>
           </p:cNvPicPr>
@@ -1380,7 +1380,7 @@
       </p:pic>
       <p:pic>
         <p:nvPicPr>
-          <p:cNvPr id="3" name="Image 1" descr="C:\Users\Thanam\AppData\Local\Temp\claude\c--Projekt-Trainings-azure-basics-training\a9e0bf4e-0d08-4082-a38a-5b8886538508\scratchpad\pptx\assets\logo-hell.png">    </p:cNvPr>
+          <p:cNvPr id="3" name="Image 1" descr="C:\Users\Thanam\AppData\Local\Temp\claude\c--Projekt-Trainings-azure-basics-training\a7a6b8eb-22f3-4b42-aecc-5af05d1502b1\scratchpad\folien\assets\logo-dunkel.png">    </p:cNvPr>
           <p:cNvPicPr>
             <a:picLocks noChangeAspect="1"/>
           </p:cNvPicPr>
@@ -1428,7 +1428,7 @@
               <a:buNone/>
               <a:defRPr lang="en-US" sz="4000" b="1" dirty="0">
                 <a:solidFill>
-                  <a:srgbClr val="FFFFFF"/>
+                  <a:srgbClr val="27303A"/>
                 </a:solidFill>
               </a:defRPr>
             </a:lvl1pPr>
@@ -1467,7 +1467,7 @@
               <a:buNone/>
               <a:defRPr lang="en-US" sz="2000" dirty="0">
                 <a:solidFill>
-                  <a:srgbClr val="DEE2FB"/>
+                  <a:srgbClr val="006FAD"/>
                 </a:solidFill>
               </a:defRPr>
             </a:lvl1pPr>
@@ -1514,7 +1514,7 @@
       </p:grpSpPr>
       <p:pic>
         <p:nvPicPr>
-          <p:cNvPr id="2" name="Image 0" descr="C:\Users\Thanam\AppData\Local\Temp\claude\c--Projekt-Trainings-azure-basics-training\a9e0bf4e-0d08-4082-a38a-5b8886538508\scratchpad\pptx\assets\logo-dunkel.png">    </p:cNvPr>
+          <p:cNvPr id="2" name="Image 0" descr="C:\Users\Thanam\AppData\Local\Temp\claude\c--Projekt-Trainings-azure-basics-training\a7a6b8eb-22f3-4b42-aecc-5af05d1502b1\scratchpad\folien\assets\logo-dunkel.png">    </p:cNvPr>
           <p:cNvPicPr>
             <a:picLocks noChangeAspect="1"/>
           </p:cNvPicPr>
@@ -1670,7 +1670,7 @@
     <p:bg>
       <p:bgPr>
         <a:solidFill>
-          <a:srgbClr val="27303A"/>
+          <a:srgbClr val="FFFFFF"/>
         </a:solidFill>
       </p:bgPr>
     </p:bg>
@@ -1690,7 +1690,7 @@
       </p:grpSpPr>
       <p:pic>
         <p:nvPicPr>
-          <p:cNvPr id="2" name="Image 0" descr="C:\Users\Thanam\AppData\Local\Temp\claude\c--Projekt-Trainings-azure-basics-training\a9e0bf4e-0d08-4082-a38a-5b8886538508\scratchpad\pptx\assets\logo-hell.png">    </p:cNvPr>
+          <p:cNvPr id="2" name="Image 0" descr="C:\Users\Thanam\AppData\Local\Temp\claude\c--Projekt-Trainings-azure-basics-training\a7a6b8eb-22f3-4b42-aecc-5af05d1502b1\scratchpad\folien\assets\logo-dunkel.png">    </p:cNvPr>
           <p:cNvPicPr>
             <a:picLocks noChangeAspect="1"/>
           </p:cNvPicPr>
@@ -1738,7 +1738,7 @@
               <a:buNone/>
               <a:defRPr lang="en-US" sz="4000" b="1" dirty="0">
                 <a:solidFill>
-                  <a:srgbClr val="FFFFFF"/>
+                  <a:srgbClr val="27303A"/>
                 </a:solidFill>
               </a:defRPr>
             </a:lvl1pPr>
@@ -1777,7 +1777,7 @@
               <a:buNone/>
               <a:defRPr lang="en-US" sz="2000" dirty="0">
                 <a:solidFill>
-                  <a:srgbClr val="DEE2FB"/>
+                  <a:srgbClr val="006FAD"/>
                 </a:solidFill>
               </a:defRPr>
             </a:lvl1pPr>
@@ -2170,7 +2170,7 @@
             <a:r>
               <a:rPr lang="en-US" sz="4400" b="1" dirty="0">
                 <a:solidFill>
-                  <a:srgbClr val="FFFFFF"/>
+                  <a:srgbClr val="27303A"/>
                 </a:solidFill>
               </a:rPr>
               <a:t>Tag 4: Azure Networking</a:t>
@@ -2208,7 +2208,7 @@
             <a:r>
               <a:rPr lang="en-US" sz="2000" dirty="0">
                 <a:solidFill>
-                  <a:srgbClr val="DEE2FB"/>
+                  <a:srgbClr val="006FAD"/>
                 </a:solidFill>
               </a:rPr>
               <a:t>Einführung in Cloud Computing mit Microsoft Azure</a:t>
@@ -2370,7 +2370,7 @@
       </p:sp>
       <p:pic>
         <p:nvPicPr>
-          <p:cNvPr id="6" name="icon-FaQuestionCircle" descr="C:\Users\Thanam\AppData\Local\Temp\claude\c--Projekt-Trainings-azure-basics-training\a9e0bf4e-0d08-4082-a38a-5b8886538508\scratchpad\pptx\assets\icons\FaQuestionCircle.png">    </p:cNvPr>
+          <p:cNvPr id="6" name="icon-FaQuestionCircle" descr="C:\Users\Thanam\AppData\Local\Temp\claude\c--Projekt-Trainings-azure-basics-training\a7a6b8eb-22f3-4b42-aecc-5af05d1502b1\scratchpad\folien\assets\icons\FaQuestionCircle.png">    </p:cNvPr>
           <p:cNvPicPr>
             <a:picLocks noChangeAspect="1"/>
           </p:cNvPicPr>
@@ -2523,7 +2523,7 @@
       </p:sp>
       <p:pic>
         <p:nvPicPr>
-          <p:cNvPr id="11" name="icon-FaQuestionCircle" descr="C:\Users\Thanam\AppData\Local\Temp\claude\c--Projekt-Trainings-azure-basics-training\a9e0bf4e-0d08-4082-a38a-5b8886538508\scratchpad\pptx\assets\icons\FaQuestionCircle.png">    </p:cNvPr>
+          <p:cNvPr id="11" name="icon-FaQuestionCircle" descr="C:\Users\Thanam\AppData\Local\Temp\claude\c--Projekt-Trainings-azure-basics-training\a7a6b8eb-22f3-4b42-aecc-5af05d1502b1\scratchpad\folien\assets\icons\FaQuestionCircle.png">    </p:cNvPr>
           <p:cNvPicPr>
             <a:picLocks noChangeAspect="1"/>
           </p:cNvPicPr>
@@ -2676,7 +2676,7 @@
       </p:sp>
       <p:pic>
         <p:nvPicPr>
-          <p:cNvPr id="16" name="icon-FaQuestionCircle" descr="C:\Users\Thanam\AppData\Local\Temp\claude\c--Projekt-Trainings-azure-basics-training\a9e0bf4e-0d08-4082-a38a-5b8886538508\scratchpad\pptx\assets\icons\FaQuestionCircle.png">    </p:cNvPr>
+          <p:cNvPr id="16" name="icon-FaQuestionCircle" descr="C:\Users\Thanam\AppData\Local\Temp\claude\c--Projekt-Trainings-azure-basics-training\a7a6b8eb-22f3-4b42-aecc-5af05d1502b1\scratchpad\folien\assets\icons\FaQuestionCircle.png">    </p:cNvPr>
           <p:cNvPicPr>
             <a:picLocks noChangeAspect="1"/>
           </p:cNvPicPr>
@@ -2937,7 +2937,7 @@
       </p:sp>
       <p:pic>
         <p:nvPicPr>
-          <p:cNvPr id="5" name="icon-FaSitemap" descr="C:\Users\Thanam\AppData\Local\Temp\claude\c--Projekt-Trainings-azure-basics-training\a9e0bf4e-0d08-4082-a38a-5b8886538508\scratchpad\pptx\assets\icons\FaSitemap.png">    </p:cNvPr>
+          <p:cNvPr id="5" name="icon-FaSitemap" descr="C:\Users\Thanam\AppData\Local\Temp\claude\c--Projekt-Trainings-azure-basics-training\a7a6b8eb-22f3-4b42-aecc-5af05d1502b1\scratchpad\folien\assets\icons\FaSitemap.png">    </p:cNvPr>
           <p:cNvPicPr>
             <a:picLocks noChangeAspect="1"/>
           </p:cNvPicPr>
@@ -3090,7 +3090,7 @@
       </p:sp>
       <p:pic>
         <p:nvPicPr>
-          <p:cNvPr id="10" name="icon-FaNetworkWired" descr="C:\Users\Thanam\AppData\Local\Temp\claude\c--Projekt-Trainings-azure-basics-training\a9e0bf4e-0d08-4082-a38a-5b8886538508\scratchpad\pptx\assets\icons\FaNetworkWired.png">    </p:cNvPr>
+          <p:cNvPr id="10" name="icon-FaNetworkWired" descr="C:\Users\Thanam\AppData\Local\Temp\claude\c--Projekt-Trainings-azure-basics-training\a7a6b8eb-22f3-4b42-aecc-5af05d1502b1\scratchpad\folien\assets\icons\FaNetworkWired.png">    </p:cNvPr>
           <p:cNvPicPr>
             <a:picLocks noChangeAspect="1"/>
           </p:cNvPicPr>
@@ -3243,7 +3243,7 @@
       </p:sp>
       <p:pic>
         <p:nvPicPr>
-          <p:cNvPr id="15" name="icon-FaShieldAlt" descr="C:\Users\Thanam\AppData\Local\Temp\claude\c--Projekt-Trainings-azure-basics-training\a9e0bf4e-0d08-4082-a38a-5b8886538508\scratchpad\pptx\assets\icons\FaShieldAlt.png">    </p:cNvPr>
+          <p:cNvPr id="15" name="icon-FaShieldAlt" descr="C:\Users\Thanam\AppData\Local\Temp\claude\c--Projekt-Trainings-azure-basics-training\a7a6b8eb-22f3-4b42-aecc-5af05d1502b1\scratchpad\folien\assets\icons\FaShieldAlt.png">    </p:cNvPr>
           <p:cNvPicPr>
             <a:picLocks noChangeAspect="1"/>
           </p:cNvPicPr>
@@ -3396,7 +3396,7 @@
       </p:sp>
       <p:pic>
         <p:nvPicPr>
-          <p:cNvPr id="20" name="icon-FaSearch" descr="C:\Users\Thanam\AppData\Local\Temp\claude\c--Projekt-Trainings-azure-basics-training\a9e0bf4e-0d08-4082-a38a-5b8886538508\scratchpad\pptx\assets\icons\FaSearch.png">    </p:cNvPr>
+          <p:cNvPr id="20" name="icon-FaSearch" descr="C:\Users\Thanam\AppData\Local\Temp\claude\c--Projekt-Trainings-azure-basics-training\a7a6b8eb-22f3-4b42-aecc-5af05d1502b1\scratchpad\folien\assets\icons\FaSearch.png">    </p:cNvPr>
           <p:cNvPicPr>
             <a:picLocks noChangeAspect="1"/>
           </p:cNvPicPr>
@@ -6895,7 +6895,7 @@
       </p:sp>
       <p:pic>
         <p:nvPicPr>
-          <p:cNvPr id="5" name="icon-FaMapMarkedAlt" descr="C:\Users\Thanam\AppData\Local\Temp\claude\c--Projekt-Trainings-azure-basics-training\a9e0bf4e-0d08-4082-a38a-5b8886538508\scratchpad\pptx\assets\icons\FaMapMarkedAlt.png">    </p:cNvPr>
+          <p:cNvPr id="5" name="icon-FaMapMarkedAlt" descr="C:\Users\Thanam\AppData\Local\Temp\claude\c--Projekt-Trainings-azure-basics-training\a7a6b8eb-22f3-4b42-aecc-5af05d1502b1\scratchpad\folien\assets\icons\FaMapMarkedAlt.png">    </p:cNvPr>
           <p:cNvPicPr>
             <a:picLocks noChangeAspect="1"/>
           </p:cNvPicPr>
@@ -7048,7 +7048,7 @@
       </p:sp>
       <p:pic>
         <p:nvPicPr>
-          <p:cNvPr id="10" name="icon-FaDoorOpen" descr="C:\Users\Thanam\AppData\Local\Temp\claude\c--Projekt-Trainings-azure-basics-training\a9e0bf4e-0d08-4082-a38a-5b8886538508\scratchpad\pptx\assets\icons\FaDoorOpen.png">    </p:cNvPr>
+          <p:cNvPr id="10" name="icon-FaDoorOpen" descr="C:\Users\Thanam\AppData\Local\Temp\claude\c--Projekt-Trainings-azure-basics-training\a7a6b8eb-22f3-4b42-aecc-5af05d1502b1\scratchpad\folien\assets\icons\FaDoorOpen.png">    </p:cNvPr>
           <p:cNvPicPr>
             <a:picLocks noChangeAspect="1"/>
           </p:cNvPicPr>
@@ -7246,10 +7246,10 @@
             <a:r>
               <a:rPr lang="en-US" sz="4000" b="1" dirty="0">
                 <a:solidFill>
-                  <a:srgbClr val="FFFFFF"/>
+                  <a:srgbClr val="27303A"/>
                 </a:solidFill>
               </a:rPr>
-              <a:t>Morgen: alles als Code</a:t>
+              <a:t>Nächstes Mal: alles als Code</a:t>
             </a:r>
             <a:endParaRPr lang="en-US" sz="4000" dirty="0"/>
           </a:p>
@@ -7284,7 +7284,7 @@
             <a:r>
               <a:rPr lang="en-US" sz="2000" dirty="0">
                 <a:solidFill>
-                  <a:srgbClr val="DEE2FB"/>
+                  <a:srgbClr val="006FAD"/>
                 </a:solidFill>
               </a:rPr>
               <a:t>Tag 5 · Automatisierung mit Bicep und cloud-init</a:t>
@@ -7295,7 +7295,7 @@
       </p:sp>
       <p:sp>
         <p:nvSpPr>
-          <p:cNvPr id="4" name="karte-dunkel"/>
+          <p:cNvPr id="4" name="karte"/>
           <p:cNvSpPr/>
           <p:nvPr/>
         </p:nvSpPr>
@@ -7310,11 +7310,11 @@
             </a:avLst>
           </a:prstGeom>
           <a:solidFill>
-            <a:srgbClr val="323C48"/>
+            <a:srgbClr val="F7F7F7"/>
           </a:solidFill>
           <a:ln w="12700">
             <a:solidFill>
-              <a:srgbClr val="323C48"/>
+              <a:srgbClr val="F7F7F7"/>
             </a:solidFill>
             <a:prstDash val="solid"/>
           </a:ln>
@@ -7347,7 +7347,7 @@
       </p:sp>
       <p:pic>
         <p:nvPicPr>
-          <p:cNvPr id="6" name="icon-FaFileCode" descr="C:\Users\Thanam\AppData\Local\Temp\claude\c--Projekt-Trainings-azure-basics-training\a9e0bf4e-0d08-4082-a38a-5b8886538508\scratchpad\pptx\assets\icons\FaFileCode.png">    </p:cNvPr>
+          <p:cNvPr id="6" name="icon-FaFileCode" descr="C:\Users\Thanam\AppData\Local\Temp\claude\c--Projekt-Trainings-azure-basics-training\a7a6b8eb-22f3-4b42-aecc-5af05d1502b1\scratchpad\folien\assets\icons\FaFileCode.png">    </p:cNvPr>
           <p:cNvPicPr>
             <a:picLocks noChangeAspect="1"/>
           </p:cNvPicPr>
@@ -7396,7 +7396,7 @@
             <a:r>
               <a:rPr lang="en-US" sz="2000" b="1" dirty="0">
                 <a:solidFill>
-                  <a:srgbClr val="FFFFFF"/>
+                  <a:srgbClr val="27303A"/>
                 </a:solidFill>
               </a:rPr>
               <a:t>Bicep</a:t>
@@ -7432,7 +7432,7 @@
             <a:r>
               <a:rPr lang="en-US" sz="1600" dirty="0">
                 <a:solidFill>
-                  <a:srgbClr val="DEE2FB"/>
+                  <a:srgbClr val="27303A"/>
                 </a:solidFill>
               </a:rPr>
               <a:t>Die Umgebung von heute in einer Datei</a:t>
@@ -7443,7 +7443,7 @@
       </p:sp>
       <p:sp>
         <p:nvSpPr>
-          <p:cNvPr id="9" name="karte-dunkel"/>
+          <p:cNvPr id="9" name="karte"/>
           <p:cNvSpPr/>
           <p:nvPr/>
         </p:nvSpPr>
@@ -7458,11 +7458,11 @@
             </a:avLst>
           </a:prstGeom>
           <a:solidFill>
-            <a:srgbClr val="323C48"/>
+            <a:srgbClr val="F7F7F7"/>
           </a:solidFill>
           <a:ln w="12700">
             <a:solidFill>
-              <a:srgbClr val="323C48"/>
+              <a:srgbClr val="F7F7F7"/>
             </a:solidFill>
             <a:prstDash val="solid"/>
           </a:ln>
@@ -7495,7 +7495,7 @@
       </p:sp>
       <p:pic>
         <p:nvPicPr>
-          <p:cNvPr id="11" name="icon-FaRocket" descr="C:\Users\Thanam\AppData\Local\Temp\claude\c--Projekt-Trainings-azure-basics-training\a9e0bf4e-0d08-4082-a38a-5b8886538508\scratchpad\pptx\assets\icons\FaRocket.png">    </p:cNvPr>
+          <p:cNvPr id="11" name="icon-FaRocket" descr="C:\Users\Thanam\AppData\Local\Temp\claude\c--Projekt-Trainings-azure-basics-training\a7a6b8eb-22f3-4b42-aecc-5af05d1502b1\scratchpad\folien\assets\icons\FaRocket.png">    </p:cNvPr>
           <p:cNvPicPr>
             <a:picLocks noChangeAspect="1"/>
           </p:cNvPicPr>
@@ -7544,7 +7544,7 @@
             <a:r>
               <a:rPr lang="en-US" sz="2000" b="1" dirty="0">
                 <a:solidFill>
-                  <a:srgbClr val="FFFFFF"/>
+                  <a:srgbClr val="27303A"/>
                 </a:solidFill>
               </a:rPr>
               <a:t>Abschlussprojekt</a:t>
@@ -7580,7 +7580,7 @@
             <a:r>
               <a:rPr lang="en-US" sz="1600" dirty="0">
                 <a:solidFill>
-                  <a:srgbClr val="DEE2FB"/>
+                  <a:srgbClr val="27303A"/>
                 </a:solidFill>
               </a:rPr>
               <a:t>Webserver der «Velo Zürich AG»</a:t>
